--- a/library/lectures/lec-10/rendered/lec-10.pptx
+++ b/library/lectures/lec-10/rendered/lec-10.pptx
@@ -626,7 +626,7 @@
           <a:lstStyle/>
           <a:p>
             <a:r>
-              <a:t>Перейдём к первому большому failure-блоку. Vertical farming — это попытка построить closed-loop AI-управляемую ферму: LED вместо солнца, питательный раствор вместо почвы, климатконтроль вместо погоды, ИИ-оптимизация всех параметров. Идея 2018-2021 годов выглядела убедительно: устранить погоду, сезонность, патогены полей; разместить производство в городах. Итог 2022-2026 годов — коллапс категории. Около трёх миллиардов долларов потерянного венчурного капитала, не менее четырнадцати банкротств только в 2025 году на сумму около миллиарда трёхсот семидесяти миллионов долларов, девяносто один процент падения венчурных инвестиций год-к-году в indoor farming сегмент.</a:t>
+              <a:t>Перейдём к первому большому failure-блоку. Vertical farming — это попытка построить closed-loop AI-управляемую ферму: LED вместо солнца, питательный раствор вместо почвы, климатконтроль вместо погоды, ИИ-оптимизация всех параметров. Идея 2018-2021 годов выглядела убедительно: устранить погоду, сезонность, патогены полей; разместить производство в городах. Итог 2022-2026 годов — коллапс категории. Около трёх миллиардов долларов потерянного венчурного капитала, не менее четырнадцати банкротств только в 2025 году на сумму около миллиарда трёхсот семидесяти миллионов долларов, минус 53 процента финансирования сегмента novel farming systems год-к-году по данным AgFunder Global AgriFoodTech Investment Report 2025 (Q1-Q3 2025 $1,5 млрд против $3,2 млрд за 2024-й).</a:t>
             </a:r>
           </a:p>
           <a:p/>
@@ -3626,7 +3626,13 @@
           <a:p/>
           <a:p>
             <a:r>
-              <a:t>И этот уровень надёжно работает у мировых лидеров и у X5. Это единственный уровень, где «AI везде» — не hype, а промышленная реальность у established игроков. Но — и это критическая анти-hype оговорка — большая часть этого слоя не специфична для сельского хозяйства, а представляет собой общий retail-supply ML. ML demand forecasting в продуктовом ритейле — это та же ML demand forecasting, что в fashion-retail или в FMCG-non-food. И это важное наблюдение: успехи L5 не доказывают «AI-готовность всей АПК-цепочки» — они доказывают зрелость retail-AI как отдельной дисциплины.</a:t>
+              <a:t>Магнит F&amp;R — четвёртый канонический success-кейс пятой ступени, и для него важно различать два модуля. Forecasting-модуль развёрнут в промышленной эксплуатации на 46 распределительных центрах с января 2026 года — это сетевой уровень и фактический паритет с мировыми лидерами в этой узкой задаче (Habr Магнит 2026). Replenishment-модуль — пилот на 3 РЦ с планом масштабирования до 10-20 к началу 2027. Это гибридный статус: половина F&amp;R-стека на мировом уровне, вторая половина — пилот-фаза. Корректная формулировка — модульное разделение, не общее «Магнит на мировом уровне» и не «Магнит на пилоте».</a:t>
+            </a:r>
+          </a:p>
+          <a:p/>
+          <a:p>
+            <a:r>
+              <a:t>И этот уровень надёжно работает у мировых лидеров, у X5 и в Forecasting-модуле Магнита. Это единственный уровень, где «AI везде» — не hype, а промышленная реальность у established игроков. Но — и это критическая анти-hype оговорка — большая часть этого слоя не специфична для сельского хозяйства, а представляет собой общий retail-supply ML. ML demand forecasting в продуктовом ритейле — это та же ML demand forecasting, что в fashion-retail или в FMCG-non-food. И это важное наблюдение: успехи L5 не доказывают «AI-готовность всей АПК-цепочки» — они доказывают зрелость retail-AI как отдельной дисциплины.</a:t>
             </a:r>
           </a:p>
           <a:p/>
@@ -4374,7 +4380,7 @@
           <a:p/>
           <a:p>
             <a:r>
-              <a:t>Справа от лестницы — стрелка с двумя надписями. Вверх растут controllability, ROI, предсказуемость; вниз падает биологическая непредсказуемость. Это и есть объяснительный механизм. И это не идеология и не прогноз; это observation 2026 года. И оно объясняет одну на первый взгляд парадоксальную ситуацию: венчурные инвестиции в on-farm AI обвалились — индекс indoor farming упал примерно на 91% год-к-году в 2024-2025-м. Одновременно инвестиции в агентный ИИ для торговли сырьём и закупочной деятельности растут двузначными темпами. Объяснение — в скорости обратной связи: на L4 трейдеры измеряют outcome хеджа в базисных пунктах за минуты-часы; на L1 фермер измеряет результат удобрения за сезон. Скорость обратной связи определяет, успевает ли ИИ окупиться до того, как меняется среда.</a:t>
+              <a:t>Справа от лестницы — стрелка с двумя надписями. Вверх растут controllability, ROI, предсказуемость; вниз падает биологическая непредсказуемость. Это и есть объяснительный механизм. И это не идеология и не прогноз; это observation 2026 года. И оно объясняет одну на первый взгляд парадоксальную ситуацию: венчурные инвестиции в indoor farming и novel farming systems обвалились — финансирование сегмента упало на 53% год-к-году (AgFunder Global Report 2025: Q1-Q3 2025 $1,5 млрд против $3,2 млрд за 2024). Одновременно инвестиции в агентный ИИ для торговли сырьём и закупочной деятельности растут двузначными темпами. Объяснение — в скорости обратной связи: на L4 трейдеры измеряют outcome хеджа в базисных пунктах за минуты-часы; на L1 фермер измеряет результат удобрения за сезон. Скорость обратной связи определяет, успевает ли ИИ окупиться до того, как меняется среда.</a:t>
             </a:r>
           </a:p>
           <a:p/>
@@ -8604,7 +8610,7 @@
                 </a:solidFill>
                 <a:latin typeface="Arial"/>
               </a:rPr>
-              <a:t>$600M от $475M SPAC + $341M долга</a:t>
+              <a:t>$475M SPAC + $341M долга ≈ $816M</a:t>
             </a:r>
           </a:p>
         </p:txBody>
@@ -8934,7 +8940,7 @@
                 </a:solidFill>
                 <a:latin typeface="Arial"/>
               </a:rPr>
-              <a:t>$672M из $700M raised; пик $2,3B</a:t>
+              <a:t>&gt;$700M raised; $32M never-used Locust Grove</a:t>
             </a:r>
           </a:p>
         </p:txBody>
